--- a/slides/okf-neo4j.pptx
+++ b/slides/okf-neo4j.pptx
@@ -1668,7 +1668,7 @@
           <a:p>
             <a:r>
               <a:rPr lang="en-US" dirty="0"/>
-              <a:t>60s: The structural graph is exact but only as connected as its explicit links. The neo4j-graphrag KG builder (SimpleKGPipeline) adds the complementary layer: schema-guided entity extraction over the policy PROSE — cost components, policy rules, teams — with FROM_CHUNK provenance back to the text. Then stitch: entity name ↔ section text matches become REFERS_TO edges. Now 'payment fees' connects the margin standard, the computation SQL, and the orders table even though no markdown link ties them. Notebook appendix runs it on two policies in ~a minute. Structural = trunk, extracted = foliage; keep them distinguishable — extracted facts are lower-trust by construction, which, fittingly, is exactly what OKF's tiers vocabulary lets you express.</a:t>
+              <a:t>60s: The structural graph is exact but only as connected as its explicit links. The neo4j-graphrag KG builder (SimpleKGPipeline) adds the complementary layer: schema-guided entity extraction over the policy PROSE — cost components, policy rules, teams — with FROM_CHUNK provenance back to the text. Then stitch: entity name ↔ section text matches become REFERS_TO edges. Now 'payment fees' connects the margin standard, the computation SQL, and the orders table even though no markdown link ties them. Notebook appendix runs it on two policies in ~a minute (server needs the APOC plugin — the repo compose installs it; okf_graph itself never calls APOC). Structural = trunk, extracted = foliage; keep them distinguishable — extracted facts are lower-trust by construction, which, fittingly, is exactly what OKF's tiers vocabulary lets you express.</a:t>
             </a:r>
             <a:endParaRPr lang="en-US" dirty="0"/>
           </a:p>
@@ -3662,7 +3662,7 @@
                 <a:ea typeface="Arial" pitchFamily="34" charset="-122"/>
                 <a:cs typeface="Arial" pitchFamily="34" charset="-120"/>
               </a:rPr>
-              <a:t>structural + provenance + lexical layers in one property graph — plain Cypher, no APOC</a:t>
+              <a:t>structural + provenance + lexical layers in one property graph — plain Cypher (APOC only in the optional extraction appendix)</a:t>
             </a:r>
             <a:endParaRPr lang="en-US" sz="1350" dirty="0"/>
           </a:p>
